--- a/presentation.pptx
+++ b/presentation.pptx
@@ -2590,7 +2590,7 @@
                   <a:srgbClr val="94A3B8"/>
                 </a:solidFill>
               </a:rPr>
-              <a:t>Student: ____________________      Roll No: ____________      Date: ____________</a:t>
+              <a:t>Student: Prateek Singh      Roll No: 10135      Date: 16 October 2026</a:t>
             </a:r>
             <a:endParaRPr lang="en-US" sz="1300" dirty="0"/>
           </a:p>
